--- a/presentation.pptx
+++ b/presentation.pptx
@@ -5,18 +5,17 @@
     <p:sldMasterId id="2147483648" r:id="rId4"/>
   </p:sldMasterIdLst>
   <p:notesMasterIdLst>
-    <p:notesMasterId r:id="rId11"/>
+    <p:notesMasterId r:id="rId10"/>
   </p:notesMasterIdLst>
   <p:handoutMasterIdLst>
-    <p:handoutMasterId r:id="rId12"/>
+    <p:handoutMasterId r:id="rId11"/>
   </p:handoutMasterIdLst>
   <p:sldIdLst>
     <p:sldId id="314" r:id="rId5"/>
     <p:sldId id="329" r:id="rId6"/>
     <p:sldId id="334" r:id="rId7"/>
     <p:sldId id="328" r:id="rId8"/>
-    <p:sldId id="344" r:id="rId9"/>
-    <p:sldId id="341" r:id="rId10"/>
+    <p:sldId id="341" r:id="rId9"/>
   </p:sldIdLst>
   <p:sldSz cx="12192000" cy="6858000"/>
   <p:notesSz cx="6858000" cy="9144000"/>
@@ -250,7 +249,7 @@
             <a:pPr rtl="0"/>
             <a:fld id="{76668813-1553-41F1-B1E5-1285F592AD4B}" type="datetime1">
               <a:rPr lang="ru-RU" smtClean="0"/>
-              <a:t>15.01.2026</a:t>
+              <a:t>19.01.2026</a:t>
             </a:fld>
             <a:endParaRPr lang="ru-RU" dirty="0"/>
           </a:p>
@@ -389,7 +388,7 @@
             <a:fld id="{C599F7B3-FCC8-49B2-A389-2D89924139FE}" type="datetime1">
               <a:rPr lang="ru-RU" smtClean="0"/>
               <a:pPr/>
-              <a:t>15.01.2026</a:t>
+              <a:t>19.01.2026</a:t>
             </a:fld>
             <a:endParaRPr lang="ru-RU" dirty="0"/>
           </a:p>
@@ -1119,100 +1118,6 @@
             <a:fld id="{96E09883-B744-4FDD-8623-D69A66650022}" type="slidenum">
               <a:rPr lang="ru-RU" smtClean="0"/>
               <a:t>5</a:t>
-            </a:fld>
-            <a:endParaRPr lang="ru-RU" dirty="0"/>
-          </a:p>
-        </p:txBody>
-      </p:sp>
-    </p:spTree>
-    <p:extLst>
-      <p:ext uri="{BB962C8B-B14F-4D97-AF65-F5344CB8AC3E}">
-        <p14:creationId xmlns:p14="http://schemas.microsoft.com/office/powerpoint/2010/main" val="3929551585"/>
-      </p:ext>
-    </p:extLst>
-  </p:cSld>
-  <p:clrMapOvr>
-    <a:masterClrMapping/>
-  </p:clrMapOvr>
-</p:notes>
-</file>
-
-<file path=ppt/notesSlides/notesSlide6.xml><?xml version="1.0" encoding="utf-8"?>
-<p:notes xmlns:a="http://schemas.openxmlformats.org/drawingml/2006/main" xmlns:r="http://schemas.openxmlformats.org/officeDocument/2006/relationships" xmlns:p="http://schemas.openxmlformats.org/presentationml/2006/main">
-  <p:cSld>
-    <p:spTree>
-      <p:nvGrpSpPr>
-        <p:cNvPr id="1" name=""/>
-        <p:cNvGrpSpPr/>
-        <p:nvPr/>
-      </p:nvGrpSpPr>
-      <p:grpSpPr>
-        <a:xfrm>
-          <a:off x="0" y="0"/>
-          <a:ext cx="0" cy="0"/>
-          <a:chOff x="0" y="0"/>
-          <a:chExt cx="0" cy="0"/>
-        </a:xfrm>
-      </p:grpSpPr>
-      <p:sp>
-        <p:nvSpPr>
-          <p:cNvPr id="2" name="Образ слайда 1"/>
-          <p:cNvSpPr>
-            <a:spLocks noGrp="1" noRot="1" noChangeAspect="1"/>
-          </p:cNvSpPr>
-          <p:nvPr>
-            <p:ph type="sldImg"/>
-          </p:nvPr>
-        </p:nvSpPr>
-        <p:spPr/>
-      </p:sp>
-      <p:sp>
-        <p:nvSpPr>
-          <p:cNvPr id="3" name="Заметки 2"/>
-          <p:cNvSpPr>
-            <a:spLocks noGrp="1"/>
-          </p:cNvSpPr>
-          <p:nvPr>
-            <p:ph type="body" idx="1"/>
-          </p:nvPr>
-        </p:nvSpPr>
-        <p:spPr/>
-        <p:txBody>
-          <a:bodyPr rtlCol="0"/>
-          <a:lstStyle>
-            <a:defPPr>
-              <a:defRPr lang="ru-RU"/>
-            </a:defPPr>
-          </a:lstStyle>
-          <a:p>
-            <a:pPr rtl="0"/>
-            <a:endParaRPr lang="ru-RU" dirty="0"/>
-          </a:p>
-        </p:txBody>
-      </p:sp>
-      <p:sp>
-        <p:nvSpPr>
-          <p:cNvPr id="4" name="Номер слайда 3"/>
-          <p:cNvSpPr>
-            <a:spLocks noGrp="1"/>
-          </p:cNvSpPr>
-          <p:nvPr>
-            <p:ph type="sldNum" sz="quarter" idx="5"/>
-          </p:nvPr>
-        </p:nvSpPr>
-        <p:spPr/>
-        <p:txBody>
-          <a:bodyPr rtlCol="0"/>
-          <a:lstStyle>
-            <a:defPPr>
-              <a:defRPr lang="ru-RU"/>
-            </a:defPPr>
-          </a:lstStyle>
-          <a:p>
-            <a:pPr rtl="0"/>
-            <a:fld id="{96E09883-B744-4FDD-8623-D69A66650022}" type="slidenum">
-              <a:rPr lang="ru-RU" smtClean="0"/>
-              <a:t>6</a:t>
             </a:fld>
             <a:endParaRPr lang="ru-RU" dirty="0"/>
           </a:p>
@@ -8746,7 +8651,7 @@
         <p:spPr>
           <a:xfrm>
             <a:off x="527964" y="1804524"/>
-            <a:ext cx="8383349" cy="1938992"/>
+            <a:ext cx="8383349" cy="4154984"/>
           </a:xfrm>
           <a:prstGeom prst="rect">
             <a:avLst/>
@@ -8766,7 +8671,45 @@
                 </a:solidFill>
                 <a:latin typeface="+mj-lt"/>
               </a:rPr>
-              <a:t>В начале игры пользователь видит стартовое окно. По окончании игры – финальное. В программе используется камера, которая позволяет следить за перемещениями главного героя.</a:t>
+              <a:t>В начале игры пользователь видит главное меню. По окончании игры – финальное окно, в котором написана концовка игры и результаты прохождения.</a:t>
+            </a:r>
+          </a:p>
+          <a:p>
+            <a:endParaRPr lang="ru-RU" sz="2400" dirty="0">
+              <a:solidFill>
+                <a:schemeClr val="bg1"/>
+              </a:solidFill>
+              <a:latin typeface="+mj-lt"/>
+            </a:endParaRPr>
+          </a:p>
+          <a:p>
+            <a:r>
+              <a:rPr lang="ru-RU" sz="2400" dirty="0">
+                <a:solidFill>
+                  <a:schemeClr val="bg1"/>
+                </a:solidFill>
+                <a:latin typeface="+mj-lt"/>
+              </a:rPr>
+              <a:t> В программе используется камера, которая позволяет менять локации.</a:t>
+            </a:r>
+          </a:p>
+          <a:p>
+            <a:endParaRPr lang="ru-RU" sz="2400" dirty="0">
+              <a:solidFill>
+                <a:schemeClr val="bg1"/>
+              </a:solidFill>
+              <a:latin typeface="+mj-lt"/>
+            </a:endParaRPr>
+          </a:p>
+          <a:p>
+            <a:r>
+              <a:rPr lang="ru-RU" sz="2400" dirty="0">
+                <a:solidFill>
+                  <a:schemeClr val="bg1"/>
+                </a:solidFill>
+                <a:latin typeface="+mj-lt"/>
+              </a:rPr>
+              <a:t>В базе данных хранится информация об уровнях: сколько ключей и очков сейчас пользователь может получить.</a:t>
             </a:r>
           </a:p>
         </p:txBody>
@@ -8819,8 +8762,8 @@
         </p:nvSpPr>
         <p:spPr>
           <a:xfrm>
-            <a:off x="535201" y="459137"/>
-            <a:ext cx="6275387" cy="3271324"/>
+            <a:off x="340467" y="1187271"/>
+            <a:ext cx="5755533" cy="4307596"/>
           </a:xfrm>
         </p:spPr>
         <p:txBody>
@@ -8832,12 +8775,84 @@
           </a:lstStyle>
           <a:p>
             <a:pPr rtl="0"/>
-            <a:endParaRPr lang="ru-RU" sz="2400" dirty="0">
-              <a:latin typeface="+mj-lt"/>
-            </a:endParaRPr>
+            <a:r>
+              <a:rPr lang="ru-RU" sz="2400" dirty="0">
+                <a:latin typeface="+mj-lt"/>
+              </a:rPr>
+              <a:t>Когда игрок проходит уровень, он получает очки и ключи. Ключи выдаются при посещении комнаты, а очки только при правильном решении головоломки или загадки.</a:t>
+            </a:r>
+          </a:p>
+          <a:p>
+            <a:pPr rtl="0"/>
+            <a:r>
+              <a:rPr lang="ru-RU" sz="2400" dirty="0">
+                <a:latin typeface="+mj-lt"/>
+              </a:rPr>
+              <a:t>После прохождения двух этажей, выполняется проверка: если собрано меньше 7 ключей, доступ на 3 этаж заблокирован. Количество очков же влияет на концовку</a:t>
+            </a:r>
           </a:p>
         </p:txBody>
       </p:sp>
+      <p:pic>
+        <p:nvPicPr>
+          <p:cNvPr id="3" name="Рисунок 2">
+            <a:extLst>
+              <a:ext uri="{FF2B5EF4-FFF2-40B4-BE49-F238E27FC236}">
+                <a16:creationId xmlns:a16="http://schemas.microsoft.com/office/drawing/2014/main" id="{2F8FFE78-BB5A-46F4-B4B7-ED000334A3BA}"/>
+              </a:ext>
+            </a:extLst>
+          </p:cNvPr>
+          <p:cNvPicPr>
+            <a:picLocks noChangeAspect="1"/>
+          </p:cNvPicPr>
+          <p:nvPr/>
+        </p:nvPicPr>
+        <p:blipFill>
+          <a:blip r:embed="rId3"/>
+          <a:stretch>
+            <a:fillRect/>
+          </a:stretch>
+        </p:blipFill>
+        <p:spPr>
+          <a:xfrm>
+            <a:off x="5938590" y="440265"/>
+            <a:ext cx="6002866" cy="3198402"/>
+          </a:xfrm>
+          <a:prstGeom prst="rect">
+            <a:avLst/>
+          </a:prstGeom>
+          <a:solidFill>
+            <a:srgbClr val="FFFFFF">
+              <a:shade val="85000"/>
+            </a:srgbClr>
+          </a:solidFill>
+          <a:ln w="88900" cap="sq">
+            <a:solidFill>
+              <a:srgbClr val="FFFFFF"/>
+            </a:solidFill>
+            <a:miter lim="800000"/>
+          </a:ln>
+          <a:effectLst>
+            <a:outerShdw blurRad="55000" dist="18000" dir="5400000" algn="tl" rotWithShape="0">
+              <a:srgbClr val="000000">
+                <a:alpha val="40000"/>
+              </a:srgbClr>
+            </a:outerShdw>
+          </a:effectLst>
+          <a:scene3d>
+            <a:camera prst="orthographicFront"/>
+            <a:lightRig rig="twoPt" dir="t">
+              <a:rot lat="0" lon="0" rev="7200000"/>
+            </a:lightRig>
+          </a:scene3d>
+          <a:sp3d>
+            <a:bevelT w="25400" h="19050"/>
+            <a:contourClr>
+              <a:srgbClr val="FFFFFF"/>
+            </a:contourClr>
+          </a:sp3d>
+        </p:spPr>
+      </p:pic>
     </p:spTree>
     <p:extLst>
       <p:ext uri="{BB962C8B-B14F-4D97-AF65-F5344CB8AC3E}">
@@ -8870,73 +8885,6 @@
       </p:grpSpPr>
       <p:sp>
         <p:nvSpPr>
-          <p:cNvPr id="4" name="Текст 3">
-            <a:extLst>
-              <a:ext uri="{FF2B5EF4-FFF2-40B4-BE49-F238E27FC236}">
-                <a16:creationId xmlns:a16="http://schemas.microsoft.com/office/drawing/2014/main" id="{B7C4DB8A-F6D0-FE86-2F30-5BB5576A5934}"/>
-              </a:ext>
-            </a:extLst>
-          </p:cNvPr>
-          <p:cNvSpPr>
-            <a:spLocks noGrp="1"/>
-          </p:cNvSpPr>
-          <p:nvPr>
-            <p:ph sz="quarter" idx="18"/>
-          </p:nvPr>
-        </p:nvSpPr>
-        <p:spPr>
-          <a:xfrm>
-            <a:off x="535201" y="459137"/>
-            <a:ext cx="6275387" cy="3271324"/>
-          </a:xfrm>
-        </p:spPr>
-        <p:txBody>
-          <a:bodyPr rtlCol="0"/>
-          <a:lstStyle>
-            <a:defPPr>
-              <a:defRPr lang="ru-RU"/>
-            </a:defPPr>
-          </a:lstStyle>
-          <a:p>
-            <a:pPr rtl="0"/>
-            <a:endParaRPr lang="ru-RU" sz="2400" dirty="0">
-              <a:latin typeface="+mj-lt"/>
-            </a:endParaRPr>
-          </a:p>
-        </p:txBody>
-      </p:sp>
-    </p:spTree>
-    <p:extLst>
-      <p:ext uri="{BB962C8B-B14F-4D97-AF65-F5344CB8AC3E}">
-        <p14:creationId xmlns:p14="http://schemas.microsoft.com/office/powerpoint/2010/main" val="262812277"/>
-      </p:ext>
-    </p:extLst>
-  </p:cSld>
-  <p:clrMapOvr>
-    <a:masterClrMapping/>
-  </p:clrMapOvr>
-</p:sld>
-</file>
-
-<file path=ppt/slides/slide6.xml><?xml version="1.0" encoding="utf-8"?>
-<p:sld xmlns:a="http://schemas.openxmlformats.org/drawingml/2006/main" xmlns:r="http://schemas.openxmlformats.org/officeDocument/2006/relationships" xmlns:p="http://schemas.openxmlformats.org/presentationml/2006/main">
-  <p:cSld>
-    <p:spTree>
-      <p:nvGrpSpPr>
-        <p:cNvPr id="1" name=""/>
-        <p:cNvGrpSpPr/>
-        <p:nvPr/>
-      </p:nvGrpSpPr>
-      <p:grpSpPr>
-        <a:xfrm>
-          <a:off x="0" y="0"/>
-          <a:ext cx="0" cy="0"/>
-          <a:chOff x="0" y="0"/>
-          <a:chExt cx="0" cy="0"/>
-        </a:xfrm>
-      </p:grpSpPr>
-      <p:sp>
-        <p:nvSpPr>
           <p:cNvPr id="2" name="Заголовок 1">
             <a:extLst>
               <a:ext uri="{FF2B5EF4-FFF2-40B4-BE49-F238E27FC236}">
@@ -9055,7 +9003,7 @@
                 </a:solidFill>
                 <a:latin typeface="+mj-lt"/>
               </a:rPr>
-              <a:t>Процент вклада: </a:t>
+              <a:t>Процент вклада: 60</a:t>
             </a:r>
             <a:r>
               <a:rPr lang="en-US" sz="2400" dirty="0">
@@ -9064,7 +9012,7 @@
                 </a:solidFill>
                 <a:latin typeface="+mj-lt"/>
               </a:rPr>
-              <a:t>xx% - </a:t>
+              <a:t>% - </a:t>
             </a:r>
             <a:r>
               <a:rPr lang="ru-RU" sz="2400" dirty="0">
@@ -9084,25 +9032,7 @@
                 </a:solidFill>
                 <a:latin typeface="+mj-lt"/>
               </a:rPr>
-              <a:t>			  </a:t>
-            </a:r>
-            <a:r>
-              <a:rPr lang="en-US" sz="2400" dirty="0">
-                <a:solidFill>
-                  <a:schemeClr val="bg1"/>
-                </a:solidFill>
-                <a:latin typeface="+mj-lt"/>
-              </a:rPr>
-              <a:t>xx</a:t>
-            </a:r>
-            <a:r>
-              <a:rPr lang="ru-RU" sz="2400" dirty="0">
-                <a:solidFill>
-                  <a:schemeClr val="bg1"/>
-                </a:solidFill>
-                <a:latin typeface="+mj-lt"/>
-              </a:rPr>
-              <a:t>% - Катя</a:t>
+              <a:t>			  40% - Катя</a:t>
             </a:r>
           </a:p>
           <a:p>
@@ -9931,6 +9861,35 @@
 </file>
 
 <file path=customXml/item1.xml><?xml version="1.0" encoding="utf-8"?>
+<?mso-contentType ?>
+<FormTemplates xmlns="http://schemas.microsoft.com/sharepoint/v3/contenttype/forms">
+  <Display>DocumentLibraryForm</Display>
+  <Edit>DocumentLibraryForm</Edit>
+  <New>DocumentLibraryForm</New>
+</FormTemplates>
+</file>
+
+<file path=customXml/item2.xml><?xml version="1.0" encoding="utf-8"?>
+<p:properties xmlns:p="http://schemas.microsoft.com/office/2006/metadata/properties" xmlns:xsi="http://www.w3.org/2001/XMLSchema-instance" xmlns:pc="http://schemas.microsoft.com/office/infopath/2007/PartnerControls">
+  <documentManagement>
+    <_ip_UnifiedCompliancePolicyUIAction xmlns="http://schemas.microsoft.com/sharepoint/v3" xsi:nil="true"/>
+    <Image xmlns="71af3243-3dd4-4a8d-8c0d-dd76da1f02a5">
+      <Url xsi:nil="true"/>
+      <Description xsi:nil="true"/>
+    </Image>
+    <Status xmlns="71af3243-3dd4-4a8d-8c0d-dd76da1f02a5">Not started</Status>
+    <Background xmlns="71af3243-3dd4-4a8d-8c0d-dd76da1f02a5">false</Background>
+    <_ip_UnifiedCompliancePolicyProperties xmlns="http://schemas.microsoft.com/sharepoint/v3" xsi:nil="true"/>
+    <ImageTagsTaxHTField xmlns="71af3243-3dd4-4a8d-8c0d-dd76da1f02a5">
+      <Terms xmlns="http://schemas.microsoft.com/office/infopath/2007/PartnerControls"/>
+    </ImageTagsTaxHTField>
+    <TaxCatchAll xmlns="230e9df3-be65-4c73-a93b-d1236ebd677e" xsi:nil="true"/>
+    <MediaServiceKeyPoints xmlns="71af3243-3dd4-4a8d-8c0d-dd76da1f02a5" xsi:nil="true"/>
+  </documentManagement>
+</p:properties>
+</file>
+
+<file path=customXml/item3.xml><?xml version="1.0" encoding="utf-8"?>
 <ct:contentTypeSchema xmlns:ct="http://schemas.microsoft.com/office/2006/metadata/contentType" xmlns:ma="http://schemas.microsoft.com/office/2006/metadata/properties/metaAttributes" ct:_="" ma:_="" ma:contentTypeName="Document" ma:contentTypeID="0x01010079F111ED35F8CC479449609E8A0923A6" ma:contentTypeVersion="28" ma:contentTypeDescription="Create a new document." ma:contentTypeScope="" ma:versionID="60f5a4f2d2b0abadcf532d48ebf9cb71">
   <xsd:schema xmlns:xsd="http://www.w3.org/2001/XMLSchema" xmlns:xs="http://www.w3.org/2001/XMLSchema" xmlns:p="http://schemas.microsoft.com/office/2006/metadata/properties" xmlns:ns1="http://schemas.microsoft.com/sharepoint/v3" xmlns:ns2="71af3243-3dd4-4a8d-8c0d-dd76da1f02a5" xmlns:ns3="16c05727-aa75-4e4a-9b5f-8a80a1165891" xmlns:ns4="230e9df3-be65-4c73-a93b-d1236ebd677e" targetNamespace="http://schemas.microsoft.com/office/2006/metadata/properties" ma:root="true" ma:fieldsID="7dd78129e6a1811f84807ad11c651531" ns1:_="" ns2:_="" ns3:_="" ns4:_="">
     <xsd:import namespace="http://schemas.microsoft.com/sharepoint/v3"/>
@@ -10242,36 +10201,27 @@
 </ct:contentTypeSchema>
 </file>
 
-<file path=customXml/item2.xml><?xml version="1.0" encoding="utf-8"?>
-<p:properties xmlns:p="http://schemas.microsoft.com/office/2006/metadata/properties" xmlns:xsi="http://www.w3.org/2001/XMLSchema-instance" xmlns:pc="http://schemas.microsoft.com/office/infopath/2007/PartnerControls">
-  <documentManagement>
-    <_ip_UnifiedCompliancePolicyUIAction xmlns="http://schemas.microsoft.com/sharepoint/v3" xsi:nil="true"/>
-    <Image xmlns="71af3243-3dd4-4a8d-8c0d-dd76da1f02a5">
-      <Url xsi:nil="true"/>
-      <Description xsi:nil="true"/>
-    </Image>
-    <Status xmlns="71af3243-3dd4-4a8d-8c0d-dd76da1f02a5">Not started</Status>
-    <Background xmlns="71af3243-3dd4-4a8d-8c0d-dd76da1f02a5">false</Background>
-    <_ip_UnifiedCompliancePolicyProperties xmlns="http://schemas.microsoft.com/sharepoint/v3" xsi:nil="true"/>
-    <ImageTagsTaxHTField xmlns="71af3243-3dd4-4a8d-8c0d-dd76da1f02a5">
-      <Terms xmlns="http://schemas.microsoft.com/office/infopath/2007/PartnerControls"/>
-    </ImageTagsTaxHTField>
-    <TaxCatchAll xmlns="230e9df3-be65-4c73-a93b-d1236ebd677e" xsi:nil="true"/>
-    <MediaServiceKeyPoints xmlns="71af3243-3dd4-4a8d-8c0d-dd76da1f02a5" xsi:nil="true"/>
-  </documentManagement>
-</p:properties>
+<file path=customXml/itemProps1.xml><?xml version="1.0" encoding="utf-8"?>
+<ds:datastoreItem xmlns:ds="http://schemas.openxmlformats.org/officeDocument/2006/customXml" ds:itemID="{85B6D968-3BA5-45CA-AFA4-01F84FB04FAA}">
+  <ds:schemaRefs>
+    <ds:schemaRef ds:uri="http://schemas.microsoft.com/sharepoint/v3/contenttype/forms"/>
+  </ds:schemaRefs>
+</ds:datastoreItem>
 </file>
 
-<file path=customXml/item3.xml><?xml version="1.0" encoding="utf-8"?>
-<?mso-contentType ?>
-<FormTemplates xmlns="http://schemas.microsoft.com/sharepoint/v3/contenttype/forms">
-  <Display>DocumentLibraryForm</Display>
-  <Edit>DocumentLibraryForm</Edit>
-  <New>DocumentLibraryForm</New>
-</FormTemplates>
+<file path=customXml/itemProps2.xml><?xml version="1.0" encoding="utf-8"?>
+<ds:datastoreItem xmlns:ds="http://schemas.openxmlformats.org/officeDocument/2006/customXml" ds:itemID="{677C52C5-6F65-4D42-B855-A3283C55581A}">
+  <ds:schemaRefs>
+    <ds:schemaRef ds:uri="http://schemas.microsoft.com/office/2006/metadata/properties"/>
+    <ds:schemaRef ds:uri="http://schemas.microsoft.com/office/infopath/2007/PartnerControls"/>
+    <ds:schemaRef ds:uri="http://schemas.microsoft.com/sharepoint/v3"/>
+    <ds:schemaRef ds:uri="71af3243-3dd4-4a8d-8c0d-dd76da1f02a5"/>
+    <ds:schemaRef ds:uri="230e9df3-be65-4c73-a93b-d1236ebd677e"/>
+  </ds:schemaRefs>
+</ds:datastoreItem>
 </file>
 
-<file path=customXml/itemProps1.xml><?xml version="1.0" encoding="utf-8"?>
+<file path=customXml/itemProps3.xml><?xml version="1.0" encoding="utf-8"?>
 <ds:datastoreItem xmlns:ds="http://schemas.openxmlformats.org/officeDocument/2006/customXml" ds:itemID="{0354E976-D9B8-49D6-BB1E-30B410663C91}">
   <ds:schemaRefs>
     <ds:schemaRef ds:uri="http://schemas.microsoft.com/office/2006/metadata/contentType"/>
@@ -10292,26 +10242,6 @@
 </ds:datastoreItem>
 </file>
 
-<file path=customXml/itemProps2.xml><?xml version="1.0" encoding="utf-8"?>
-<ds:datastoreItem xmlns:ds="http://schemas.openxmlformats.org/officeDocument/2006/customXml" ds:itemID="{677C52C5-6F65-4D42-B855-A3283C55581A}">
-  <ds:schemaRefs>
-    <ds:schemaRef ds:uri="http://schemas.microsoft.com/office/2006/metadata/properties"/>
-    <ds:schemaRef ds:uri="http://schemas.microsoft.com/office/infopath/2007/PartnerControls"/>
-    <ds:schemaRef ds:uri="http://schemas.microsoft.com/sharepoint/v3"/>
-    <ds:schemaRef ds:uri="71af3243-3dd4-4a8d-8c0d-dd76da1f02a5"/>
-    <ds:schemaRef ds:uri="230e9df3-be65-4c73-a93b-d1236ebd677e"/>
-  </ds:schemaRefs>
-</ds:datastoreItem>
-</file>
-
-<file path=customXml/itemProps3.xml><?xml version="1.0" encoding="utf-8"?>
-<ds:datastoreItem xmlns:ds="http://schemas.openxmlformats.org/officeDocument/2006/customXml" ds:itemID="{85B6D968-3BA5-45CA-AFA4-01F84FB04FAA}">
-  <ds:schemaRefs>
-    <ds:schemaRef ds:uri="http://schemas.microsoft.com/sharepoint/v3/contenttype/forms"/>
-  </ds:schemaRefs>
-</ds:datastoreItem>
-</file>
-
 <file path=docMetadata/LabelInfo.xml><?xml version="1.0" encoding="utf-8"?>
 <clbl:labelList xmlns:clbl="http://schemas.microsoft.com/office/2020/mipLabelMetadata"/>
 </file>